--- a/fixtures/board-deck.pptx
+++ b/fixtures/board-deck.pptx
@@ -16,7 +16,10 @@
         <p:txBody>
           <a:p>
             <a:r>
-              <a:t>Follow up with Priya Natarajan on (415) 555-0199 before Friday.</a:t>
+              <a:t xml:space="preserve">Follow up with Priya </a:t>
+            </a:r>
+            <a:r>
+              <a:t xml:space="preserve">Natarajan on (415) 555-0199 before Friday.</a:t>
             </a:r>
           </a:p>
         </p:txBody>
@@ -42,7 +45,10 @@
           <a:bodyPr/>
           <a:p>
             <a:r>
-              <a:t>Priya Natarajan</a:t>
+              <a:t>Priya</a:t>
+            </a:r>
+            <a:r>
+              <a:t xml:space="preserve"> Natarajan</a:t>
             </a:r>
           </a:p>
         </p:txBody>
@@ -72,37 +78,37 @@
                     <a:bodyPr/>
                     <a:p>
                       <a:r>
-                        <a:t>Full Name</a:t>
-                      </a:r>
-                    </a:p>
-                  </a:txBody>
-                </a:tc>
-                <a:tc>
-                  <a:txBody>
-                    <a:bodyPr/>
-                    <a:p>
-                      <a:r>
-                        <a:t>Email</a:t>
-                      </a:r>
-                    </a:p>
-                  </a:txBody>
-                </a:tc>
-                <a:tc>
-                  <a:txBody>
-                    <a:bodyPr/>
-                    <a:p>
-                      <a:r>
-                        <a:t>Phone</a:t>
-                      </a:r>
-                    </a:p>
-                  </a:txBody>
-                </a:tc>
-                <a:tc>
-                  <a:txBody>
-                    <a:bodyPr/>
-                    <a:p>
-                      <a:r>
-                        <a:t>Department</a:t>
+                        <a:t xml:space="preserve">Full Name</a:t>
+                      </a:r>
+                    </a:p>
+                  </a:txBody>
+                </a:tc>
+                <a:tc>
+                  <a:txBody>
+                    <a:bodyPr/>
+                    <a:p>
+                      <a:r>
+                        <a:t xml:space="preserve">Email</a:t>
+                      </a:r>
+                    </a:p>
+                  </a:txBody>
+                </a:tc>
+                <a:tc>
+                  <a:txBody>
+                    <a:bodyPr/>
+                    <a:p>
+                      <a:r>
+                        <a:t xml:space="preserve">Phone</a:t>
+                      </a:r>
+                    </a:p>
+                  </a:txBody>
+                </a:tc>
+                <a:tc>
+                  <a:txBody>
+                    <a:bodyPr/>
+                    <a:p>
+                      <a:r>
+                        <a:t xml:space="preserve">Department</a:t>
                       </a:r>
                     </a:p>
                   </a:txBody>
@@ -114,37 +120,43 @@
                     <a:bodyPr/>
                     <a:p>
                       <a:r>
-                        <a:t>Diego Marques</a:t>
-                      </a:r>
-                    </a:p>
-                  </a:txBody>
-                </a:tc>
-                <a:tc>
-                  <a:txBody>
-                    <a:bodyPr/>
-                    <a:p>
-                      <a:r>
-                        <a:t>diego.marques@contoso.example</a:t>
-                      </a:r>
-                    </a:p>
-                  </a:txBody>
-                </a:tc>
-                <a:tc>
-                  <a:txBody>
-                    <a:bodyPr/>
-                    <a:p>
-                      <a:r>
-                        <a:t>+1 (415) 555-0142</a:t>
-                      </a:r>
-                    </a:p>
-                  </a:txBody>
-                </a:tc>
-                <a:tc>
-                  <a:txBody>
-                    <a:bodyPr/>
-                    <a:p>
-                      <a:r>
-                        <a:t>Finance</a:t>
+                        <a:t xml:space="preserve">Diego </a:t>
+                      </a:r>
+                      <a:r>
+                        <a:t xml:space="preserve">Marques</a:t>
+                      </a:r>
+                    </a:p>
+                  </a:txBody>
+                </a:tc>
+                <a:tc>
+                  <a:txBody>
+                    <a:bodyPr/>
+                    <a:p>
+                      <a:r>
+                        <a:t xml:space="preserve">diego.marques@</a:t>
+                      </a:r>
+                      <a:r>
+                        <a:t xml:space="preserve">contoso.example</a:t>
+                      </a:r>
+                    </a:p>
+                  </a:txBody>
+                </a:tc>
+                <a:tc>
+                  <a:txBody>
+                    <a:bodyPr/>
+                    <a:p>
+                      <a:r>
+                        <a:t xml:space="preserve">+1 (415) 555-0142</a:t>
+                      </a:r>
+                    </a:p>
+                  </a:txBody>
+                </a:tc>
+                <a:tc>
+                  <a:txBody>
+                    <a:bodyPr/>
+                    <a:p>
+                      <a:r>
+                        <a:t xml:space="preserve">Finance</a:t>
                       </a:r>
                     </a:p>
                   </a:txBody>
@@ -156,37 +168,37 @@
                     <a:bodyPr/>
                     <a:p>
                       <a:r>
-                        <a:t>Amara Okafor</a:t>
-                      </a:r>
-                    </a:p>
-                  </a:txBody>
-                </a:tc>
-                <a:tc>
-                  <a:txBody>
-                    <a:bodyPr/>
-                    <a:p>
-                      <a:r>
-                        <a:t>amara.okafor@contoso.example</a:t>
-                      </a:r>
-                    </a:p>
-                  </a:txBody>
-                </a:tc>
-                <a:tc>
-                  <a:txBody>
-                    <a:bodyPr/>
-                    <a:p>
-                      <a:r>
-                        <a:t>+44 20 7946 0123</a:t>
-                      </a:r>
-                    </a:p>
-                  </a:txBody>
-                </a:tc>
-                <a:tc>
-                  <a:txBody>
-                    <a:bodyPr/>
-                    <a:p>
-                      <a:r>
-                        <a:t>Engineering</a:t>
+                        <a:t xml:space="preserve">Amara Okafor</a:t>
+                      </a:r>
+                    </a:p>
+                  </a:txBody>
+                </a:tc>
+                <a:tc>
+                  <a:txBody>
+                    <a:bodyPr/>
+                    <a:p>
+                      <a:r>
+                        <a:t xml:space="preserve">amara.okafor@contoso.example</a:t>
+                      </a:r>
+                    </a:p>
+                  </a:txBody>
+                </a:tc>
+                <a:tc>
+                  <a:txBody>
+                    <a:bodyPr/>
+                    <a:p>
+                      <a:r>
+                        <a:t xml:space="preserve">+44 20 7946 0123</a:t>
+                      </a:r>
+                    </a:p>
+                  </a:txBody>
+                </a:tc>
+                <a:tc>
+                  <a:txBody>
+                    <a:bodyPr/>
+                    <a:p>
+                      <a:r>
+                        <a:t xml:space="preserve">Engineering</a:t>
                       </a:r>
                     </a:p>
                   </a:txBody>
